--- a/DBTUNING/ch08_Optimizer와통계/ch08_교안.pptx
+++ b/DBTUNING/ch08_Optimizer와통계/ch08_교안.pptx
@@ -540,7 +540,7 @@
           <a:lstStyle/>
           <a:p>
             <a:r>
-              <a:t>제13장은 옵티마이저가 왜 틀리는가를 정면으로 다루는 장이다. 앞 장들에서 실행계획을 읽고 판단하는 법을 익혔다면, 이 장은 그 판단의 재료인 통계정보 자체를 의심해 보는 장이다. 특히 이번 차시는 설명만 듣는 것이 아니라 히스토그램을 직접 제거하고 다시 만들어 보면서 추정치가 어떻게 달라지는지를 눈으로 확인한다. 통계를 일시적으로 변경하는 실습이므로 종료 시 반드시 원상복구해야 한다는 점을 첫 화면에서부터 못 박아 두는 것이 좋다.</a:t>
+              <a:t>제ch08은 옵티마이저가 왜 틀리는가를 정면으로 다루는 장이다. 앞 장들에서 실행계획을 읽고 판단하는 법을 익혔다면, 이 장은 그 판단의 재료인 통계정보 자체를 의심해 보는 장이다. 특히 이번 차시는 설명만 듣는 것이 아니라 히스토그램을 직접 제거하고 다시 만들어 보면서 추정치가 어떻게 달라지는지를 눈으로 확인한다. 통계를 일시적으로 변경하는 실습이므로 종료 시 반드시 원상복구해야 한다는 점을 첫 화면에서부터 못 박아 두는 것이 좋다.</a:t>
             </a:r>
           </a:p>
         </p:txBody>
@@ -6287,7 +6287,7 @@
                 </a:solidFill>
                 <a:latin typeface="Malgun Gothic"/>
               </a:rPr>
-              <a:t>Oracle SQL 튜닝 과정  ·  제13장</a:t>
+              <a:t>Oracle SQL 튜닝 과정  ·  제ch08</a:t>
             </a:r>
           </a:p>
         </p:txBody>
@@ -10512,7 +10512,7 @@
                 </a:solidFill>
                 <a:latin typeface="Malgun Gothic"/>
               </a:rPr>
-              <a:t>•  Chapter 7과의 연결</a:t>
+              <a:t>•  ch09과의 연결</a:t>
             </a:r>
           </a:p>
           <a:p>
@@ -10678,7 +10678,7 @@
                 </a:solidFill>
                 <a:latin typeface="Malgun Gothic"/>
               </a:rPr>
-              <a:t>이 사례는 실습문제 3번과 직접 연결된다. Chapter 7의 조인 실행 원리를 함께 놓고 설명하면, 통계 문제와 조인 문제가 별개가 아니라 하나의 사슬이라는 점이 드러난다.</a:t>
+              <a:t>이 사례는 실습문제 3번과 직접 연결된다. ch09의 조인 실행 원리를 함께 놓고 설명하면, 통계 문제와 조인 문제가 별개가 아니라 하나의 사슬이라는 점이 드러난다.</a:t>
             </a:r>
           </a:p>
         </p:txBody>
@@ -13109,7 +13109,7 @@
                 </a:solidFill>
                 <a:latin typeface="Malgun Gothic"/>
               </a:rPr>
-              <a:t>•  Chapter 2에서 확인한 것</a:t>
+              <a:t>•  ch02에서 확인한 것</a:t>
             </a:r>
           </a:p>
           <a:p>
@@ -13346,7 +13346,7 @@
                 </a:solidFill>
                 <a:latin typeface="Malgun Gothic"/>
               </a:rPr>
-              <a:t>•  Chapter 3 Q1의 오차를 다시 본다</a:t>
+              <a:t>•  ch03 Q1의 오차를 다시 본다</a:t>
             </a:r>
           </a:p>
           <a:p>
@@ -14294,7 +14294,7 @@
                 </a:solidFill>
                 <a:latin typeface="Malgun Gothic"/>
               </a:rPr>
-              <a:t>•  실습문제 10문항 — SQL튜닝_Ch13_문제.md</a:t>
+              <a:t>•  실습문제 10문항 — ch08_문제.md</a:t>
             </a:r>
           </a:p>
           <a:p>
@@ -14316,7 +14316,7 @@
                 </a:solidFill>
                 <a:latin typeface="Malgun Gothic"/>
               </a:rPr>
-              <a:t>    –  3번  과소추정이 조인 쿼리로 확장될 때의 위험 — Chapter 7 연계</a:t>
+              <a:t>    –  3번  과소추정이 조인 쿼리로 확장될 때의 위험 — ch09 연계</a:t>
             </a:r>
           </a:p>
           <a:p>
@@ -14382,7 +14382,7 @@
                 </a:solidFill>
                 <a:latin typeface="Malgun Gothic"/>
               </a:rPr>
-              <a:t>    –  9·10번  바인드 변수 Peeking과의 상충, Chapter 3 Q1 사례 재검토</a:t>
+              <a:t>    –  9·10번  바인드 변수 Peeking과의 상충, ch03 Q1 사례 재검토</a:t>
             </a:r>
           </a:p>
           <a:p>
@@ -14576,7 +14576,7 @@
                 </a:solidFill>
                 <a:latin typeface="Malgun Gothic"/>
               </a:rPr>
-              <a:t>•  Chapter 2에서 남은 질문 — 히스토그램이 없었다면 어땠을까</a:t>
+              <a:t>•  ch02에서 남은 질문 — 히스토그램이 없었다면 어땠을까</a:t>
             </a:r>
           </a:p>
           <a:p>
@@ -14702,7 +14702,7 @@
                 </a:solidFill>
                 <a:latin typeface="Malgun Gothic"/>
               </a:rPr>
-              <a:t>Chapter 2가 남긴 질문</a:t>
+              <a:t>ch02가 남긴 질문</a:t>
             </a:r>
           </a:p>
         </p:txBody>
@@ -14736,7 +14736,7 @@
                 </a:solidFill>
                 <a:latin typeface="Malgun Gothic"/>
               </a:rPr>
-              <a:t>•  Chapter 2에서 확인한 것</a:t>
+              <a:t>•  ch02에서 확인한 것</a:t>
             </a:r>
           </a:p>
           <a:p>

--- a/DBTUNING/ch08_Optimizer와통계/ch08_교안.pptx
+++ b/DBTUNING/ch08_Optimizer와통계/ch08_교안.pptx
@@ -540,7 +540,7 @@
           <a:lstStyle/>
           <a:p>
             <a:r>
-              <a:t>제ch08은 옵티마이저가 왜 틀리는가를 정면으로 다루는 장이다. 앞 장들에서 실행계획을 읽고 판단하는 법을 익혔다면, 이 장은 그 판단의 재료인 통계정보 자체를 의심해 보는 장이다. 특히 이번 차시는 설명만 듣는 것이 아니라 히스토그램을 직접 제거하고 다시 만들어 보면서 추정치가 어떻게 달라지는지를 눈으로 확인한다. 통계를 일시적으로 변경하는 실습이므로 종료 시 반드시 원상복구해야 한다는 점을 첫 화면에서부터 못 박아 두는 것이 좋다.</a:t>
+              <a:t>ch08은 옵티마이저가 왜 틀리는가를 정면으로 다루는 장이다. 앞 장들에서 실행계획을 읽고 판단하는 법을 익혔다면, 이 장은 그 판단의 재료인 통계정보 자체를 의심해 보는 장이다. 특히 이번 차시는 설명만 듣는 것이 아니라 히스토그램을 직접 제거하고 다시 만들어 보면서 추정치가 어떻게 달라지는지를 눈으로 확인한다. 통계를 일시적으로 변경하는 실습이므로 종료 시 반드시 원상복구해야 한다는 점을 첫 화면에서부터 못 박아 두는 것이 좋다.</a:t>
             </a:r>
           </a:p>
         </p:txBody>
@@ -6287,7 +6287,7 @@
                 </a:solidFill>
                 <a:latin typeface="Malgun Gothic"/>
               </a:rPr>
-              <a:t>Oracle SQL 튜닝 과정  ·  제ch08</a:t>
+              <a:t>Oracle SQL 튜닝 과정  ·  ch08</a:t>
             </a:r>
           </a:p>
         </p:txBody>
